--- a/templates bleus/Template_8_1J.pptx
+++ b/templates bleus/Template_8_1J.pptx
@@ -214,7 +214,7 @@
           <a:p>
             <a:fld id="{7758DB49-402F-FB41-B58E-980CBE386162}" type="datetimeFigureOut">
               <a:rPr lang="fr-FR" smtClean="0"/>
-              <a:t>02/07/2026</a:t>
+              <a:t>07/07/2026</a:t>
             </a:fld>
             <a:endParaRPr lang="fr-FR"/>
           </a:p>
@@ -660,7 +660,7 @@
           <a:p>
             <a:fld id="{5BCAD085-E8A6-8845-BD4E-CB4CCA059FC4}" type="datetimeFigureOut">
               <a:rPr lang="en-US" smtClean="0"/>
-              <a:t>7/2/26</a:t>
+              <a:t>7/7/26</a:t>
             </a:fld>
             <a:endParaRPr lang="en-US"/>
           </a:p>
@@ -828,7 +828,7 @@
           <a:p>
             <a:fld id="{5BCAD085-E8A6-8845-BD4E-CB4CCA059FC4}" type="datetimeFigureOut">
               <a:rPr lang="en-US" smtClean="0"/>
-              <a:t>7/2/26</a:t>
+              <a:t>7/7/26</a:t>
             </a:fld>
             <a:endParaRPr lang="en-US"/>
           </a:p>
@@ -1006,7 +1006,7 @@
           <a:p>
             <a:fld id="{5BCAD085-E8A6-8845-BD4E-CB4CCA059FC4}" type="datetimeFigureOut">
               <a:rPr lang="en-US" smtClean="0"/>
-              <a:t>7/2/26</a:t>
+              <a:t>7/7/26</a:t>
             </a:fld>
             <a:endParaRPr lang="en-US"/>
           </a:p>
@@ -1174,7 +1174,7 @@
           <a:p>
             <a:fld id="{5BCAD085-E8A6-8845-BD4E-CB4CCA059FC4}" type="datetimeFigureOut">
               <a:rPr lang="en-US" smtClean="0"/>
-              <a:t>7/2/26</a:t>
+              <a:t>7/7/26</a:t>
             </a:fld>
             <a:endParaRPr lang="en-US"/>
           </a:p>
@@ -1419,7 +1419,7 @@
           <a:p>
             <a:fld id="{5BCAD085-E8A6-8845-BD4E-CB4CCA059FC4}" type="datetimeFigureOut">
               <a:rPr lang="en-US" smtClean="0"/>
-              <a:t>7/2/26</a:t>
+              <a:t>7/7/26</a:t>
             </a:fld>
             <a:endParaRPr lang="en-US"/>
           </a:p>
@@ -1704,7 +1704,7 @@
           <a:p>
             <a:fld id="{5BCAD085-E8A6-8845-BD4E-CB4CCA059FC4}" type="datetimeFigureOut">
               <a:rPr lang="en-US" smtClean="0"/>
-              <a:t>7/2/26</a:t>
+              <a:t>7/7/26</a:t>
             </a:fld>
             <a:endParaRPr lang="en-US"/>
           </a:p>
@@ -2123,7 +2123,7 @@
           <a:p>
             <a:fld id="{5BCAD085-E8A6-8845-BD4E-CB4CCA059FC4}" type="datetimeFigureOut">
               <a:rPr lang="en-US" smtClean="0"/>
-              <a:t>7/2/26</a:t>
+              <a:t>7/7/26</a:t>
             </a:fld>
             <a:endParaRPr lang="en-US"/>
           </a:p>
@@ -2240,7 +2240,7 @@
           <a:p>
             <a:fld id="{5BCAD085-E8A6-8845-BD4E-CB4CCA059FC4}" type="datetimeFigureOut">
               <a:rPr lang="en-US" smtClean="0"/>
-              <a:t>7/2/26</a:t>
+              <a:t>7/7/26</a:t>
             </a:fld>
             <a:endParaRPr lang="en-US"/>
           </a:p>
@@ -2335,7 +2335,7 @@
           <a:p>
             <a:fld id="{5BCAD085-E8A6-8845-BD4E-CB4CCA059FC4}" type="datetimeFigureOut">
               <a:rPr lang="en-US" smtClean="0"/>
-              <a:t>7/2/26</a:t>
+              <a:t>7/7/26</a:t>
             </a:fld>
             <a:endParaRPr lang="en-US"/>
           </a:p>
@@ -2610,7 +2610,7 @@
           <a:p>
             <a:fld id="{5BCAD085-E8A6-8845-BD4E-CB4CCA059FC4}" type="datetimeFigureOut">
               <a:rPr lang="en-US" smtClean="0"/>
-              <a:t>7/2/26</a:t>
+              <a:t>7/7/26</a:t>
             </a:fld>
             <a:endParaRPr lang="en-US"/>
           </a:p>
@@ -2862,7 +2862,7 @@
           <a:p>
             <a:fld id="{5BCAD085-E8A6-8845-BD4E-CB4CCA059FC4}" type="datetimeFigureOut">
               <a:rPr lang="en-US" smtClean="0"/>
-              <a:t>7/2/26</a:t>
+              <a:t>7/7/26</a:t>
             </a:fld>
             <a:endParaRPr lang="en-US"/>
           </a:p>
@@ -3073,7 +3073,7 @@
           <a:p>
             <a:fld id="{5BCAD085-E8A6-8845-BD4E-CB4CCA059FC4}" type="datetimeFigureOut">
               <a:rPr lang="en-US" smtClean="0"/>
-              <a:t>7/2/26</a:t>
+              <a:t>7/7/26</a:t>
             </a:fld>
             <a:endParaRPr lang="en-US"/>
           </a:p>
@@ -12209,6 +12209,91 @@
               <a:rPr lang="fr-FR" sz="700" dirty="0"/>
               <a:t>{{LOGO}}</a:t>
             </a:r>
+          </a:p>
+        </p:txBody>
+      </p:sp>
+      <p:sp>
+        <p:nvSpPr>
+          <p:cNvPr id="132" name="ZoneTexte 131">
+            <a:extLst>
+              <a:ext uri="{FF2B5EF4-FFF2-40B4-BE49-F238E27FC236}">
+                <a16:creationId xmlns:a16="http://schemas.microsoft.com/office/drawing/2014/main" id="{90115D96-DCB7-E340-8059-9CE0C6925EE1}"/>
+              </a:ext>
+            </a:extLst>
+          </p:cNvPr>
+          <p:cNvSpPr txBox="1"/>
+          <p:nvPr/>
+        </p:nvSpPr>
+        <p:spPr>
+          <a:xfrm>
+            <a:off x="6472885" y="2520000"/>
+            <a:ext cx="3383087" cy="523220"/>
+          </a:xfrm>
+          <a:prstGeom prst="rect">
+            <a:avLst/>
+          </a:prstGeom>
+          <a:noFill/>
+        </p:spPr>
+        <p:txBody>
+          <a:bodyPr wrap="square" rtlCol="0">
+            <a:spAutoFit/>
+          </a:bodyPr>
+          <a:lstStyle/>
+          <a:p>
+            <a:pPr algn="ctr"/>
+            <a:r>
+              <a:rPr lang="fr-FR" sz="2800" dirty="0">
+                <a:latin typeface="Grindy Brush" panose="02000500000000000000" pitchFamily="2" charset="0"/>
+                <a:ea typeface="Noto Sans" panose="020B0502040504020204" pitchFamily="34" charset="0"/>
+                <a:cs typeface="Noto Sans" panose="020B0502040504020204" pitchFamily="34" charset="0"/>
+              </a:rPr>
+              <a:t>1-2</a:t>
+            </a:r>
+          </a:p>
+        </p:txBody>
+      </p:sp>
+      <p:sp>
+        <p:nvSpPr>
+          <p:cNvPr id="133" name="ZoneTexte 132">
+            <a:extLst>
+              <a:ext uri="{FF2B5EF4-FFF2-40B4-BE49-F238E27FC236}">
+                <a16:creationId xmlns:a16="http://schemas.microsoft.com/office/drawing/2014/main" id="{424BA7A6-52AA-014D-BD37-BBABD9149DC3}"/>
+              </a:ext>
+            </a:extLst>
+          </p:cNvPr>
+          <p:cNvSpPr txBox="1"/>
+          <p:nvPr/>
+        </p:nvSpPr>
+        <p:spPr>
+          <a:xfrm>
+            <a:off x="6592473" y="4753354"/>
+            <a:ext cx="3383087" cy="523220"/>
+          </a:xfrm>
+          <a:prstGeom prst="rect">
+            <a:avLst/>
+          </a:prstGeom>
+          <a:noFill/>
+        </p:spPr>
+        <p:txBody>
+          <a:bodyPr wrap="square" rtlCol="0">
+            <a:spAutoFit/>
+          </a:bodyPr>
+          <a:lstStyle/>
+          <a:p>
+            <a:pPr algn="ctr"/>
+            <a:r>
+              <a:rPr lang="fr-FR" sz="2800">
+                <a:latin typeface="Grindy Brush" panose="02000500000000000000" pitchFamily="2" charset="0"/>
+                <a:ea typeface="Noto Sans" panose="020B0502040504020204" pitchFamily="34" charset="0"/>
+                <a:cs typeface="Noto Sans" panose="020B0502040504020204" pitchFamily="34" charset="0"/>
+              </a:rPr>
+              <a:t>3-4</a:t>
+            </a:r>
+            <a:endParaRPr lang="fr-FR" sz="2800" dirty="0">
+              <a:latin typeface="Grindy Brush" panose="02000500000000000000" pitchFamily="2" charset="0"/>
+              <a:ea typeface="Noto Sans" panose="020B0502040504020204" pitchFamily="34" charset="0"/>
+              <a:cs typeface="Noto Sans" panose="020B0502040504020204" pitchFamily="34" charset="0"/>
+            </a:endParaRPr>
           </a:p>
         </p:txBody>
       </p:sp>
